--- a/Andy/FinMem_架構圖.pptx
+++ b/Andy/FinMem_架構圖.pptx
@@ -3096,8 +3096,8 @@
         </p:nvSpPr>
         <p:spPr>
           <a:xfrm>
-            <a:off x="274320" y="73152"/>
-            <a:ext cx="11612880" cy="365760"/>
+            <a:off x="274320" y="54864"/>
+            <a:ext cx="11612880" cy="320040"/>
           </a:xfrm>
           <a:prstGeom prst="rect">
             <a:avLst/>
@@ -3111,7 +3111,7 @@
           <a:lstStyle/>
           <a:p>
             <a:r>
-              <a:rPr sz="1600" b="1">
+              <a:rPr sz="1500" b="1">
                 <a:solidFill>
                   <a:srgbClr val="202020"/>
                 </a:solidFill>
@@ -3130,8 +3130,147 @@
         </p:nvSpPr>
         <p:spPr>
           <a:xfrm>
-            <a:off x="320040" y="502920"/>
-            <a:ext cx="1170432" cy="1051560"/>
+            <a:off x="6644487" y="384048"/>
+            <a:ext cx="1737360" cy="566928"/>
+          </a:xfrm>
+          <a:prstGeom prst="roundRect">
+            <a:avLst/>
+          </a:prstGeom>
+          <a:solidFill>
+            <a:srgbClr val="DDE8F5"/>
+          </a:solidFill>
+          <a:ln w="12700">
+            <a:solidFill>
+              <a:srgbClr val="2E6DA4"/>
+            </a:solidFill>
+          </a:ln>
+          <a:effectLst/>
+        </p:spPr>
+        <p:style>
+          <a:lnRef idx="1">
+            <a:schemeClr val="accent1"/>
+          </a:lnRef>
+          <a:fillRef idx="3">
+            <a:schemeClr val="accent1"/>
+          </a:fillRef>
+          <a:effectRef idx="2">
+            <a:schemeClr val="accent1"/>
+          </a:effectRef>
+          <a:fontRef idx="minor">
+            <a:schemeClr val="lt1"/>
+          </a:fontRef>
+        </p:style>
+        <p:txBody>
+          <a:bodyPr rtlCol="0" anchor="ctr" wrap="square" lIns="30000" rIns="30000"/>
+          <a:lstStyle/>
+          <a:p>
+            <a:pPr algn="ctr"/>
+            <a:r>
+              <a:rPr sz="900" b="1">
+                <a:solidFill>
+                  <a:srgbClr val="2E6DA4"/>
+                </a:solidFill>
+                <a:latin typeface="Microsoft JhengHei"/>
+              </a:rPr>
+              <a:t>Profiling Module</a:t>
+            </a:r>
+          </a:p>
+          <a:p>
+            <a:pPr algn="ctr"/>
+            <a:r>
+              <a:rPr sz="900" b="1">
+                <a:solidFill>
+                  <a:srgbClr val="2E6DA4"/>
+                </a:solidFill>
+                <a:latin typeface="Microsoft JhengHei"/>
+              </a:rPr>
+              <a:t>角色設定(一次性)</a:t>
+            </a:r>
+          </a:p>
+        </p:txBody>
+      </p:sp>
+      <p:cxnSp>
+        <p:nvCxnSpPr>
+          <p:cNvPr id="4" name="Connector 3"/>
+          <p:cNvCxnSpPr/>
+          <p:nvPr/>
+        </p:nvCxnSpPr>
+        <p:spPr>
+          <a:xfrm>
+            <a:off x="7513167" y="950976"/>
+            <a:ext cx="0" cy="283464"/>
+          </a:xfrm>
+          <a:prstGeom prst="line">
+            <a:avLst/>
+          </a:prstGeom>
+          <a:ln w="19050">
+            <a:solidFill>
+              <a:srgbClr val="2E6DA4"/>
+            </a:solidFill>
+            <a:prstDash val="dash"/>
+          </a:ln>
+        </p:spPr>
+        <p:style>
+          <a:lnRef idx="2">
+            <a:schemeClr val="accent1"/>
+          </a:lnRef>
+          <a:fillRef idx="0">
+            <a:schemeClr val="accent1"/>
+          </a:fillRef>
+          <a:effectRef idx="1">
+            <a:schemeClr val="accent1"/>
+          </a:effectRef>
+          <a:fontRef idx="minor">
+            <a:schemeClr val="tx1"/>
+          </a:fontRef>
+        </p:style>
+      </p:cxnSp>
+      <p:sp>
+        <p:nvSpPr>
+          <p:cNvPr id="5" name="TextBox 4"/>
+          <p:cNvSpPr txBox="1"/>
+          <p:nvPr/>
+        </p:nvSpPr>
+        <p:spPr>
+          <a:xfrm>
+            <a:off x="8519007" y="411479"/>
+            <a:ext cx="2468880" cy="548640"/>
+          </a:xfrm>
+          <a:prstGeom prst="rect">
+            <a:avLst/>
+          </a:prstGeom>
+          <a:noFill/>
+        </p:spPr>
+        <p:txBody>
+          <a:bodyPr wrap="square">
+            <a:spAutoFit/>
+          </a:bodyPr>
+          <a:lstStyle/>
+          <a:p>
+            <a:pPr algn="l"/>
+            <a:r>
+              <a:rPr sz="750" b="0">
+                <a:solidFill>
+                  <a:srgbClr val="2E6DA4"/>
+                </a:solidFill>
+                <a:latin typeface="Microsoft JhengHei"/>
+              </a:rPr>
+              <a:t>非每日流程,建立 Agent 時
+設定一次,供 Reflect 引用</a:t>
+            </a:r>
+          </a:p>
+        </p:txBody>
+      </p:sp>
+      <p:sp>
+        <p:nvSpPr>
+          <p:cNvPr id="6" name="Rounded Rectangle 5"/>
+          <p:cNvSpPr/>
+          <p:nvPr/>
+        </p:nvSpPr>
+        <p:spPr>
+          <a:xfrm>
+            <a:off x="975207" y="1234440"/>
+            <a:ext cx="1371600" cy="1572768"/>
           </a:xfrm>
           <a:prstGeom prst="roundRect">
             <a:avLst/>
@@ -3161,7 +3300,7 @@
           </a:fontRef>
         </p:style>
         <p:txBody>
-          <a:bodyPr rtlCol="0" anchor="ctr" wrap="square" lIns="36000" rIns="36000"/>
+          <a:bodyPr rtlCol="0" anchor="ctr" wrap="square" lIns="30000" rIns="30000"/>
           <a:lstStyle/>
           <a:p>
             <a:pPr algn="ctr"/>
@@ -3184,7 +3323,7 @@
                 </a:solidFill>
                 <a:latin typeface="Microsoft JhengHei"/>
               </a:rPr>
-              <a:t>新聞/10-K/10-Q</a:t>
+              <a:t>新聞 / 10-K / 10-Q</a:t>
             </a:r>
           </a:p>
           <a:p>
@@ -3203,14 +3342,14 @@
       </p:sp>
       <p:sp>
         <p:nvSpPr>
-          <p:cNvPr id="4" name="Right Arrow 3"/>
+          <p:cNvPr id="7" name="Right Arrow 6"/>
           <p:cNvSpPr/>
           <p:nvPr/>
         </p:nvSpPr>
         <p:spPr>
           <a:xfrm>
-            <a:off x="1517904" y="882396"/>
-            <a:ext cx="256032" cy="292608"/>
+            <a:off x="2374239" y="1435607"/>
+            <a:ext cx="219456" cy="256032"/>
           </a:xfrm>
           <a:prstGeom prst="rightArrow">
             <a:avLst/>
@@ -3247,14 +3386,58 @@
       </p:sp>
       <p:sp>
         <p:nvSpPr>
-          <p:cNvPr id="5" name="Rounded Rectangle 4"/>
+          <p:cNvPr id="8" name="Right Arrow 7"/>
           <p:cNvSpPr/>
           <p:nvPr/>
         </p:nvSpPr>
         <p:spPr>
           <a:xfrm>
-            <a:off x="1801368" y="502920"/>
-            <a:ext cx="1170432" cy="1051560"/>
+            <a:off x="2374239" y="2350008"/>
+            <a:ext cx="219456" cy="256032"/>
+          </a:xfrm>
+          <a:prstGeom prst="rightArrow">
+            <a:avLst/>
+          </a:prstGeom>
+          <a:solidFill>
+            <a:srgbClr val="9A9A9A"/>
+          </a:solidFill>
+          <a:ln>
+            <a:noFill/>
+          </a:ln>
+          <a:effectLst/>
+        </p:spPr>
+        <p:style>
+          <a:lnRef idx="1">
+            <a:schemeClr val="accent1"/>
+          </a:lnRef>
+          <a:fillRef idx="3">
+            <a:schemeClr val="accent1"/>
+          </a:fillRef>
+          <a:effectRef idx="2">
+            <a:schemeClr val="accent1"/>
+          </a:effectRef>
+          <a:fontRef idx="minor">
+            <a:schemeClr val="lt1"/>
+          </a:fontRef>
+        </p:style>
+        <p:txBody>
+          <a:bodyPr rtlCol="0" anchor="ctr"/>
+          <a:lstStyle/>
+          <a:p>
+            <a:pPr algn="ctr"/>
+          </a:p>
+        </p:txBody>
+      </p:sp>
+      <p:sp>
+        <p:nvSpPr>
+          <p:cNvPr id="9" name="Rounded Rectangle 8"/>
+          <p:cNvSpPr/>
+          <p:nvPr/>
+        </p:nvSpPr>
+        <p:spPr>
+          <a:xfrm>
+            <a:off x="2621127" y="1234440"/>
+            <a:ext cx="1188720" cy="658368"/>
           </a:xfrm>
           <a:prstGeom prst="roundRect">
             <a:avLst/>
@@ -3284,44 +3467,44 @@
           </a:fontRef>
         </p:style>
         <p:txBody>
-          <a:bodyPr rtlCol="0" anchor="ctr" wrap="square" lIns="36000" rIns="36000"/>
+          <a:bodyPr rtlCol="0" anchor="ctr" wrap="square" lIns="30000" rIns="30000"/>
           <a:lstStyle/>
           <a:p>
             <a:pPr algn="ctr"/>
             <a:r>
-              <a:rPr sz="950" b="1">
+              <a:rPr sz="900" b="1">
                 <a:solidFill>
                   <a:srgbClr val="202020"/>
                 </a:solidFill>
                 <a:latin typeface="Microsoft JhengHei"/>
               </a:rPr>
-              <a:t>Profiling</a:t>
+              <a:t>Summarize</a:t>
             </a:r>
           </a:p>
           <a:p>
             <a:pPr algn="ctr"/>
             <a:r>
-              <a:rPr sz="950" b="1">
+              <a:rPr sz="900" b="1">
                 <a:solidFill>
                   <a:srgbClr val="202020"/>
                 </a:solidFill>
                 <a:latin typeface="Microsoft JhengHei"/>
               </a:rPr>
-              <a:t>角色設定</a:t>
-            </a:r>
-          </a:p>
-        </p:txBody>
-      </p:sp>
-      <p:sp>
-        <p:nvSpPr>
-          <p:cNvPr id="6" name="Right Arrow 5"/>
+              <a:t>摘要＋情緒</a:t>
+            </a:r>
+          </a:p>
+        </p:txBody>
+      </p:sp>
+      <p:sp>
+        <p:nvSpPr>
+          <p:cNvPr id="10" name="Right Arrow 9"/>
           <p:cNvSpPr/>
           <p:nvPr/>
         </p:nvSpPr>
         <p:spPr>
           <a:xfrm>
-            <a:off x="2999232" y="882396"/>
-            <a:ext cx="256032" cy="292608"/>
+            <a:off x="3837279" y="1435607"/>
+            <a:ext cx="219456" cy="256032"/>
           </a:xfrm>
           <a:prstGeom prst="rightArrow">
             <a:avLst/>
@@ -3358,14 +3541,14 @@
       </p:sp>
       <p:sp>
         <p:nvSpPr>
-          <p:cNvPr id="7" name="Rounded Rectangle 6"/>
+          <p:cNvPr id="11" name="Rounded Rectangle 10"/>
           <p:cNvSpPr/>
           <p:nvPr/>
         </p:nvSpPr>
         <p:spPr>
           <a:xfrm>
-            <a:off x="3282696" y="502920"/>
-            <a:ext cx="1170432" cy="480059"/>
+            <a:off x="4084167" y="1234440"/>
+            <a:ext cx="1188720" cy="658368"/>
           </a:xfrm>
           <a:prstGeom prst="roundRect">
             <a:avLst/>
@@ -3395,7 +3578,7 @@
           </a:fontRef>
         </p:style>
         <p:txBody>
-          <a:bodyPr rtlCol="0" anchor="ctr" wrap="square" lIns="36000" rIns="36000"/>
+          <a:bodyPr rtlCol="0" anchor="ctr" wrap="square" lIns="30000" rIns="30000"/>
           <a:lstStyle/>
           <a:p>
             <a:pPr algn="ctr"/>
@@ -3406,7 +3589,7 @@
                 </a:solidFill>
                 <a:latin typeface="Microsoft JhengHei"/>
               </a:rPr>
-              <a:t>Summarize</a:t>
+              <a:t>Layered</a:t>
             </a:r>
           </a:p>
           <a:p>
@@ -3418,21 +3601,77 @@
                 </a:solidFill>
                 <a:latin typeface="Microsoft JhengHei"/>
               </a:rPr>
-              <a:t>摘要+情緒</a:t>
-            </a:r>
-          </a:p>
-        </p:txBody>
-      </p:sp>
-      <p:sp>
-        <p:nvSpPr>
-          <p:cNvPr id="8" name="Rounded Rectangle 7"/>
+              <a:t>Memory</a:t>
+            </a:r>
+          </a:p>
+          <a:p>
+            <a:pPr algn="ctr"/>
+            <a:r>
+              <a:rPr sz="850" b="1">
+                <a:solidFill>
+                  <a:srgbClr val="202020"/>
+                </a:solidFill>
+                <a:latin typeface="Microsoft JhengHei"/>
+              </a:rPr>
+              <a:t>分層長期記憶</a:t>
+            </a:r>
+          </a:p>
+        </p:txBody>
+      </p:sp>
+      <p:sp>
+        <p:nvSpPr>
+          <p:cNvPr id="12" name="Right Arrow 11"/>
           <p:cNvSpPr/>
           <p:nvPr/>
         </p:nvSpPr>
         <p:spPr>
           <a:xfrm>
-            <a:off x="3282696" y="1074420"/>
-            <a:ext cx="1170432" cy="480059"/>
+            <a:off x="5300319" y="1435607"/>
+            <a:ext cx="219456" cy="256032"/>
+          </a:xfrm>
+          <a:prstGeom prst="rightArrow">
+            <a:avLst/>
+          </a:prstGeom>
+          <a:solidFill>
+            <a:srgbClr val="9A9A9A"/>
+          </a:solidFill>
+          <a:ln>
+            <a:noFill/>
+          </a:ln>
+          <a:effectLst/>
+        </p:spPr>
+        <p:style>
+          <a:lnRef idx="1">
+            <a:schemeClr val="accent1"/>
+          </a:lnRef>
+          <a:fillRef idx="3">
+            <a:schemeClr val="accent1"/>
+          </a:fillRef>
+          <a:effectRef idx="2">
+            <a:schemeClr val="accent1"/>
+          </a:effectRef>
+          <a:fontRef idx="minor">
+            <a:schemeClr val="lt1"/>
+          </a:fontRef>
+        </p:style>
+        <p:txBody>
+          <a:bodyPr rtlCol="0" anchor="ctr"/>
+          <a:lstStyle/>
+          <a:p>
+            <a:pPr algn="ctr"/>
+          </a:p>
+        </p:txBody>
+      </p:sp>
+      <p:sp>
+        <p:nvSpPr>
+          <p:cNvPr id="13" name="Rounded Rectangle 12"/>
+          <p:cNvSpPr/>
+          <p:nvPr/>
+        </p:nvSpPr>
+        <p:spPr>
+          <a:xfrm>
+            <a:off x="5547207" y="1234440"/>
+            <a:ext cx="1097280" cy="658368"/>
           </a:xfrm>
           <a:prstGeom prst="roundRect">
             <a:avLst/>
@@ -3462,44 +3701,44 @@
           </a:fontRef>
         </p:style>
         <p:txBody>
-          <a:bodyPr rtlCol="0" anchor="ctr" wrap="square" lIns="36000" rIns="36000"/>
+          <a:bodyPr rtlCol="0" anchor="ctr" wrap="square" lIns="30000" rIns="30000"/>
           <a:lstStyle/>
           <a:p>
             <a:pPr algn="ctr"/>
             <a:r>
-              <a:rPr sz="850" b="1">
+              <a:rPr sz="900" b="1">
                 <a:solidFill>
                   <a:srgbClr val="202020"/>
                 </a:solidFill>
                 <a:latin typeface="Microsoft JhengHei"/>
               </a:rPr>
-              <a:t>Observe</a:t>
+              <a:t>Retrieve</a:t>
             </a:r>
           </a:p>
           <a:p>
             <a:pPr algn="ctr"/>
             <a:r>
-              <a:rPr sz="850" b="1">
+              <a:rPr sz="900" b="1">
                 <a:solidFill>
                   <a:srgbClr val="202020"/>
                 </a:solidFill>
                 <a:latin typeface="Microsoft JhengHei"/>
               </a:rPr>
-              <a:t>動能觀察</a:t>
-            </a:r>
-          </a:p>
-        </p:txBody>
-      </p:sp>
-      <p:sp>
-        <p:nvSpPr>
-          <p:cNvPr id="9" name="Right Arrow 8"/>
+              <a:t>記憶檢索</a:t>
+            </a:r>
+          </a:p>
+        </p:txBody>
+      </p:sp>
+      <p:sp>
+        <p:nvSpPr>
+          <p:cNvPr id="14" name="Right Arrow 13"/>
           <p:cNvSpPr/>
           <p:nvPr/>
         </p:nvSpPr>
         <p:spPr>
           <a:xfrm>
-            <a:off x="4480560" y="882396"/>
-            <a:ext cx="256032" cy="292608"/>
+            <a:off x="6671919" y="1435607"/>
+            <a:ext cx="219456" cy="256032"/>
           </a:xfrm>
           <a:prstGeom prst="rightArrow">
             <a:avLst/>
@@ -3536,14 +3775,14 @@
       </p:sp>
       <p:sp>
         <p:nvSpPr>
-          <p:cNvPr id="10" name="Rounded Rectangle 9"/>
+          <p:cNvPr id="15" name="Rounded Rectangle 14"/>
           <p:cNvSpPr/>
           <p:nvPr/>
         </p:nvSpPr>
         <p:spPr>
           <a:xfrm>
-            <a:off x="4764024" y="502920"/>
-            <a:ext cx="1170432" cy="1051560"/>
+            <a:off x="2621127" y="2148840"/>
+            <a:ext cx="1188720" cy="658368"/>
           </a:xfrm>
           <a:prstGeom prst="roundRect">
             <a:avLst/>
@@ -3573,62 +3812,50 @@
           </a:fontRef>
         </p:style>
         <p:txBody>
-          <a:bodyPr rtlCol="0" anchor="ctr" wrap="square" lIns="36000" rIns="36000"/>
+          <a:bodyPr rtlCol="0" anchor="ctr" wrap="square" lIns="30000" rIns="30000"/>
           <a:lstStyle/>
           <a:p>
             <a:pPr algn="ctr"/>
             <a:r>
-              <a:rPr sz="950" b="1">
+              <a:rPr sz="900" b="1">
                 <a:solidFill>
                   <a:srgbClr val="202020"/>
                 </a:solidFill>
                 <a:latin typeface="Microsoft JhengHei"/>
               </a:rPr>
-              <a:t>Layered</a:t>
+              <a:t>Observe</a:t>
             </a:r>
           </a:p>
           <a:p>
             <a:pPr algn="ctr"/>
             <a:r>
-              <a:rPr sz="950" b="1">
+              <a:rPr sz="900" b="1">
                 <a:solidFill>
                   <a:srgbClr val="202020"/>
                 </a:solidFill>
                 <a:latin typeface="Microsoft JhengHei"/>
               </a:rPr>
-              <a:t>Memory</a:t>
-            </a:r>
-          </a:p>
-          <a:p>
-            <a:pPr algn="ctr"/>
-            <a:r>
-              <a:rPr sz="950" b="1">
-                <a:solidFill>
-                  <a:srgbClr val="202020"/>
-                </a:solidFill>
-                <a:latin typeface="Microsoft JhengHei"/>
-              </a:rPr>
-              <a:t>分層長期記憶</a:t>
-            </a:r>
-          </a:p>
-        </p:txBody>
-      </p:sp>
-      <p:sp>
-        <p:nvSpPr>
-          <p:cNvPr id="11" name="Right Arrow 10"/>
+              <a:t>動能觀察</a:t>
+            </a:r>
+          </a:p>
+        </p:txBody>
+      </p:sp>
+      <p:sp>
+        <p:nvSpPr>
+          <p:cNvPr id="16" name="Right Arrow 15"/>
           <p:cNvSpPr/>
           <p:nvPr/>
         </p:nvSpPr>
         <p:spPr>
           <a:xfrm>
-            <a:off x="5961888" y="882396"/>
-            <a:ext cx="256032" cy="292608"/>
+            <a:off x="3837279" y="2350008"/>
+            <a:ext cx="3054095" cy="256032"/>
           </a:xfrm>
           <a:prstGeom prst="rightArrow">
             <a:avLst/>
           </a:prstGeom>
           <a:solidFill>
-            <a:srgbClr val="9A9A9A"/>
+            <a:srgbClr val="D98A3A"/>
           </a:solidFill>
           <a:ln>
             <a:noFill/>
@@ -3659,14 +3886,49 @@
       </p:sp>
       <p:sp>
         <p:nvSpPr>
-          <p:cNvPr id="12" name="Rounded Rectangle 11"/>
+          <p:cNvPr id="17" name="TextBox 16"/>
+          <p:cNvSpPr txBox="1"/>
+          <p:nvPr/>
+        </p:nvSpPr>
+        <p:spPr>
+          <a:xfrm>
+            <a:off x="3837279" y="2624328"/>
+            <a:ext cx="3054095" cy="228600"/>
+          </a:xfrm>
+          <a:prstGeom prst="rect">
+            <a:avLst/>
+          </a:prstGeom>
+          <a:noFill/>
+        </p:spPr>
+        <p:txBody>
+          <a:bodyPr wrap="square">
+            <a:spAutoFit/>
+          </a:bodyPr>
+          <a:lstStyle/>
+          <a:p>
+            <a:pPr algn="ctr"/>
+            <a:r>
+              <a:rPr sz="750" b="1">
+                <a:solidFill>
+                  <a:srgbClr val="D98A3A"/>
+                </a:solidFill>
+                <a:latin typeface="Microsoft JhengHei"/>
+              </a:rPr>
+              <a:t>直接提供市場事實,略過記憶層</a:t>
+            </a:r>
+          </a:p>
+        </p:txBody>
+      </p:sp>
+      <p:sp>
+        <p:nvSpPr>
+          <p:cNvPr id="18" name="Rounded Rectangle 17"/>
           <p:cNvSpPr/>
           <p:nvPr/>
         </p:nvSpPr>
         <p:spPr>
           <a:xfrm>
-            <a:off x="6245352" y="502920"/>
-            <a:ext cx="1170432" cy="1051560"/>
+            <a:off x="6918807" y="1234440"/>
+            <a:ext cx="1188720" cy="1572768"/>
           </a:xfrm>
           <a:prstGeom prst="roundRect">
             <a:avLst/>
@@ -3696,44 +3958,44 @@
           </a:fontRef>
         </p:style>
         <p:txBody>
-          <a:bodyPr rtlCol="0" anchor="ctr" wrap="square" lIns="36000" rIns="36000"/>
+          <a:bodyPr rtlCol="0" anchor="ctr" wrap="square" lIns="30000" rIns="30000"/>
           <a:lstStyle/>
           <a:p>
             <a:pPr algn="ctr"/>
             <a:r>
-              <a:rPr sz="950" b="1">
+              <a:rPr sz="1000" b="1">
                 <a:solidFill>
                   <a:srgbClr val="202020"/>
                 </a:solidFill>
                 <a:latin typeface="Microsoft JhengHei"/>
               </a:rPr>
-              <a:t>Retrieve</a:t>
+              <a:t>Reflect</a:t>
             </a:r>
           </a:p>
           <a:p>
             <a:pPr algn="ctr"/>
             <a:r>
-              <a:rPr sz="950" b="1">
+              <a:rPr sz="1000" b="1">
                 <a:solidFill>
                   <a:srgbClr val="202020"/>
                 </a:solidFill>
                 <a:latin typeface="Microsoft JhengHei"/>
               </a:rPr>
-              <a:t>記憶檢索</a:t>
-            </a:r>
-          </a:p>
-        </p:txBody>
-      </p:sp>
-      <p:sp>
-        <p:nvSpPr>
-          <p:cNvPr id="13" name="Right Arrow 12"/>
+              <a:t>反思推理</a:t>
+            </a:r>
+          </a:p>
+        </p:txBody>
+      </p:sp>
+      <p:sp>
+        <p:nvSpPr>
+          <p:cNvPr id="19" name="Right Arrow 18"/>
           <p:cNvSpPr/>
           <p:nvPr/>
         </p:nvSpPr>
         <p:spPr>
           <a:xfrm>
-            <a:off x="7443216" y="882396"/>
-            <a:ext cx="256032" cy="292608"/>
+            <a:off x="8134959" y="1892807"/>
+            <a:ext cx="219456" cy="256032"/>
           </a:xfrm>
           <a:prstGeom prst="rightArrow">
             <a:avLst/>
@@ -3770,14 +4032,14 @@
       </p:sp>
       <p:sp>
         <p:nvSpPr>
-          <p:cNvPr id="14" name="Rounded Rectangle 13"/>
+          <p:cNvPr id="20" name="Rounded Rectangle 19"/>
           <p:cNvSpPr/>
           <p:nvPr/>
         </p:nvSpPr>
         <p:spPr>
           <a:xfrm>
-            <a:off x="7726680" y="502920"/>
-            <a:ext cx="1170432" cy="1051560"/>
+            <a:off x="8381847" y="1632204"/>
+            <a:ext cx="1188720" cy="777240"/>
           </a:xfrm>
           <a:prstGeom prst="roundRect">
             <a:avLst/>
@@ -3807,7 +4069,7 @@
           </a:fontRef>
         </p:style>
         <p:txBody>
-          <a:bodyPr rtlCol="0" anchor="ctr" wrap="square" lIns="36000" rIns="36000"/>
+          <a:bodyPr rtlCol="0" anchor="ctr" wrap="square" lIns="30000" rIns="30000"/>
           <a:lstStyle/>
           <a:p>
             <a:pPr algn="ctr"/>
@@ -3818,7 +4080,7 @@
                 </a:solidFill>
                 <a:latin typeface="Microsoft JhengHei"/>
               </a:rPr>
-              <a:t>Reflect</a:t>
+              <a:t>Decision</a:t>
             </a:r>
           </a:p>
           <a:p>
@@ -3830,21 +4092,33 @@
                 </a:solidFill>
                 <a:latin typeface="Microsoft JhengHei"/>
               </a:rPr>
-              <a:t>反思推理</a:t>
-            </a:r>
-          </a:p>
-        </p:txBody>
-      </p:sp>
-      <p:sp>
-        <p:nvSpPr>
-          <p:cNvPr id="15" name="Right Arrow 14"/>
+              <a:t>-making</a:t>
+            </a:r>
+          </a:p>
+          <a:p>
+            <a:pPr algn="ctr"/>
+            <a:r>
+              <a:rPr sz="950" b="1">
+                <a:solidFill>
+                  <a:srgbClr val="202020"/>
+                </a:solidFill>
+                <a:latin typeface="Microsoft JhengHei"/>
+              </a:rPr>
+              <a:t>決策輸出</a:t>
+            </a:r>
+          </a:p>
+        </p:txBody>
+      </p:sp>
+      <p:sp>
+        <p:nvSpPr>
+          <p:cNvPr id="21" name="Right Arrow 20"/>
           <p:cNvSpPr/>
           <p:nvPr/>
         </p:nvSpPr>
         <p:spPr>
           <a:xfrm>
-            <a:off x="8924544" y="882396"/>
-            <a:ext cx="256032" cy="292608"/>
+            <a:off x="9597999" y="1892807"/>
+            <a:ext cx="219456" cy="256032"/>
           </a:xfrm>
           <a:prstGeom prst="rightArrow">
             <a:avLst/>
@@ -3881,137 +4155,14 @@
       </p:sp>
       <p:sp>
         <p:nvSpPr>
-          <p:cNvPr id="16" name="Rounded Rectangle 15"/>
+          <p:cNvPr id="22" name="Rounded Rectangle 21"/>
           <p:cNvSpPr/>
           <p:nvPr/>
         </p:nvSpPr>
         <p:spPr>
           <a:xfrm>
-            <a:off x="9208008" y="502920"/>
-            <a:ext cx="1170432" cy="1051560"/>
-          </a:xfrm>
-          <a:prstGeom prst="roundRect">
-            <a:avLst/>
-          </a:prstGeom>
-          <a:solidFill>
-            <a:srgbClr val="FFFFFF"/>
-          </a:solidFill>
-          <a:ln w="12700">
-            <a:solidFill>
-              <a:srgbClr val="404040"/>
-            </a:solidFill>
-          </a:ln>
-          <a:effectLst/>
-        </p:spPr>
-        <p:style>
-          <a:lnRef idx="1">
-            <a:schemeClr val="accent1"/>
-          </a:lnRef>
-          <a:fillRef idx="3">
-            <a:schemeClr val="accent1"/>
-          </a:fillRef>
-          <a:effectRef idx="2">
-            <a:schemeClr val="accent1"/>
-          </a:effectRef>
-          <a:fontRef idx="minor">
-            <a:schemeClr val="lt1"/>
-          </a:fontRef>
-        </p:style>
-        <p:txBody>
-          <a:bodyPr rtlCol="0" anchor="ctr" wrap="square" lIns="36000" rIns="36000"/>
-          <a:lstStyle/>
-          <a:p>
-            <a:pPr algn="ctr"/>
-            <a:r>
-              <a:rPr sz="950" b="1">
-                <a:solidFill>
-                  <a:srgbClr val="202020"/>
-                </a:solidFill>
-                <a:latin typeface="Microsoft JhengHei"/>
-              </a:rPr>
-              <a:t>Decision</a:t>
-            </a:r>
-          </a:p>
-          <a:p>
-            <a:pPr algn="ctr"/>
-            <a:r>
-              <a:rPr sz="950" b="1">
-                <a:solidFill>
-                  <a:srgbClr val="202020"/>
-                </a:solidFill>
-                <a:latin typeface="Microsoft JhengHei"/>
-              </a:rPr>
-              <a:t>-making</a:t>
-            </a:r>
-          </a:p>
-          <a:p>
-            <a:pPr algn="ctr"/>
-            <a:r>
-              <a:rPr sz="950" b="1">
-                <a:solidFill>
-                  <a:srgbClr val="202020"/>
-                </a:solidFill>
-                <a:latin typeface="Microsoft JhengHei"/>
-              </a:rPr>
-              <a:t>決策輸出</a:t>
-            </a:r>
-          </a:p>
-        </p:txBody>
-      </p:sp>
-      <p:sp>
-        <p:nvSpPr>
-          <p:cNvPr id="17" name="Right Arrow 16"/>
-          <p:cNvSpPr/>
-          <p:nvPr/>
-        </p:nvSpPr>
-        <p:spPr>
-          <a:xfrm>
-            <a:off x="10405872" y="882396"/>
-            <a:ext cx="256032" cy="292608"/>
-          </a:xfrm>
-          <a:prstGeom prst="rightArrow">
-            <a:avLst/>
-          </a:prstGeom>
-          <a:solidFill>
-            <a:srgbClr val="9A9A9A"/>
-          </a:solidFill>
-          <a:ln>
-            <a:noFill/>
-          </a:ln>
-          <a:effectLst/>
-        </p:spPr>
-        <p:style>
-          <a:lnRef idx="1">
-            <a:schemeClr val="accent1"/>
-          </a:lnRef>
-          <a:fillRef idx="3">
-            <a:schemeClr val="accent1"/>
-          </a:fillRef>
-          <a:effectRef idx="2">
-            <a:schemeClr val="accent1"/>
-          </a:effectRef>
-          <a:fontRef idx="minor">
-            <a:schemeClr val="lt1"/>
-          </a:fontRef>
-        </p:style>
-        <p:txBody>
-          <a:bodyPr rtlCol="0" anchor="ctr"/>
-          <a:lstStyle/>
-          <a:p>
-            <a:pPr algn="ctr"/>
-          </a:p>
-        </p:txBody>
-      </p:sp>
-      <p:sp>
-        <p:nvSpPr>
-          <p:cNvPr id="18" name="Rounded Rectangle 17"/>
-          <p:cNvSpPr/>
-          <p:nvPr/>
-        </p:nvSpPr>
-        <p:spPr>
-          <a:xfrm>
-            <a:off x="10689336" y="502920"/>
-            <a:ext cx="1170432" cy="1051560"/>
+            <a:off x="9844887" y="1632204"/>
+            <a:ext cx="1371600" cy="777240"/>
           </a:xfrm>
           <a:prstGeom prst="roundRect">
             <a:avLst/>
@@ -4041,12 +4192,12 @@
           </a:fontRef>
         </p:style>
         <p:txBody>
-          <a:bodyPr rtlCol="0" anchor="ctr" wrap="square" lIns="36000" rIns="36000"/>
+          <a:bodyPr rtlCol="0" anchor="ctr" wrap="square" lIns="30000" rIns="30000"/>
           <a:lstStyle/>
           <a:p>
             <a:pPr algn="ctr"/>
             <a:r>
-              <a:rPr sz="900" b="0">
+              <a:rPr sz="950" b="0">
                 <a:solidFill>
                   <a:srgbClr val="202020"/>
                 </a:solidFill>
@@ -4058,28 +4209,28 @@
           <a:p>
             <a:pPr algn="ctr"/>
             <a:r>
-              <a:rPr sz="900" b="0">
+              <a:rPr sz="950" b="0">
                 <a:solidFill>
                   <a:srgbClr val="202020"/>
                 </a:solidFill>
                 <a:latin typeface="Microsoft JhengHei"/>
               </a:rPr>
-              <a:t>Buy/Sell/Hold</a:t>
+              <a:t>Buy / Sell / Hold</a:t>
             </a:r>
           </a:p>
         </p:txBody>
       </p:sp>
       <p:graphicFrame>
         <p:nvGraphicFramePr>
-          <p:cNvPr id="19" name="Table 18"/>
+          <p:cNvPr id="23" name="Table 22"/>
           <p:cNvGraphicFramePr>
             <a:graphicFrameLocks noGrp="1"/>
           </p:cNvGraphicFramePr>
           <p:nvPr/>
         </p:nvGraphicFramePr>
         <p:xfrm>
-          <a:off x="320040" y="1874519"/>
-          <a:ext cx="11539726" cy="4709155"/>
+          <a:off x="975207" y="3218688"/>
+          <a:ext cx="10241279" cy="3566159"/>
         </p:xfrm>
         <a:graphic>
           <a:graphicData uri="http://schemas.openxmlformats.org/drawingml/2006/table">
@@ -4088,13 +4239,13 @@
                 <a:tableStyleId>{5C22544A-7EE6-4342-B048-85BDC9FD1C3A}</a:tableStyleId>
               </a:tblPr>
               <a:tblGrid>
-                <a:gridCol w="1269370"/>
-                <a:gridCol w="3461918"/>
-                <a:gridCol w="2307945"/>
-                <a:gridCol w="2307945"/>
-                <a:gridCol w="2192548"/>
+                <a:gridCol w="1126540"/>
+                <a:gridCol w="3072384"/>
+                <a:gridCol w="2048256"/>
+                <a:gridCol w="2048256"/>
+                <a:gridCol w="1945843"/>
               </a:tblGrid>
-              <a:tr h="365760">
+              <a:tr h="329184">
                 <a:tc>
                   <a:txBody>
                     <a:bodyPr wrap="square"/>
@@ -4102,7 +4253,7 @@
                     <a:p>
                       <a:pPr algn="ctr"/>
                       <a:r>
-                        <a:rPr sz="1050" b="1">
+                        <a:rPr sz="1000" b="1">
                           <a:solidFill>
                             <a:srgbClr val="FFFFFF"/>
                           </a:solidFill>
@@ -4112,7 +4263,7 @@
                       </a:r>
                     </a:p>
                   </a:txBody>
-                  <a:tcPr marL="45000" marR="45000" marT="18000" marB="18000" anchor="ctr">
+                  <a:tcPr marL="40000" marR="40000" marT="12000" marB="12000" anchor="ctr">
                     <a:solidFill>
                       <a:srgbClr val="2E3B4E"/>
                     </a:solidFill>
@@ -4125,7 +4276,7 @@
                     <a:p>
                       <a:pPr algn="ctr"/>
                       <a:r>
-                        <a:rPr sz="1050" b="1">
+                        <a:rPr sz="1000" b="1">
                           <a:solidFill>
                             <a:srgbClr val="FFFFFF"/>
                           </a:solidFill>
@@ -4135,7 +4286,7 @@
                       </a:r>
                     </a:p>
                   </a:txBody>
-                  <a:tcPr marL="45000" marR="45000" marT="18000" marB="18000" anchor="ctr">
+                  <a:tcPr marL="40000" marR="40000" marT="12000" marB="12000" anchor="ctr">
                     <a:solidFill>
                       <a:srgbClr val="2E3B4E"/>
                     </a:solidFill>
@@ -4148,7 +4299,7 @@
                     <a:p>
                       <a:pPr algn="ctr"/>
                       <a:r>
-                        <a:rPr sz="1050" b="1">
+                        <a:rPr sz="1000" b="1">
                           <a:solidFill>
                             <a:srgbClr val="FFFFFF"/>
                           </a:solidFill>
@@ -4158,7 +4309,7 @@
                       </a:r>
                     </a:p>
                   </a:txBody>
-                  <a:tcPr marL="45000" marR="45000" marT="18000" marB="18000" anchor="ctr">
+                  <a:tcPr marL="40000" marR="40000" marT="12000" marB="12000" anchor="ctr">
                     <a:solidFill>
                       <a:srgbClr val="2E3B4E"/>
                     </a:solidFill>
@@ -4171,7 +4322,7 @@
                     <a:p>
                       <a:pPr algn="ctr"/>
                       <a:r>
-                        <a:rPr sz="1050" b="1">
+                        <a:rPr sz="1000" b="1">
                           <a:solidFill>
                             <a:srgbClr val="FFFFFF"/>
                           </a:solidFill>
@@ -4181,7 +4332,7 @@
                       </a:r>
                     </a:p>
                   </a:txBody>
-                  <a:tcPr marL="45000" marR="45000" marT="18000" marB="18000" anchor="ctr">
+                  <a:tcPr marL="40000" marR="40000" marT="12000" marB="12000" anchor="ctr">
                     <a:solidFill>
                       <a:srgbClr val="2E3B4E"/>
                     </a:solidFill>
@@ -4194,7 +4345,7 @@
                     <a:p>
                       <a:pPr algn="ctr"/>
                       <a:r>
-                        <a:rPr sz="1050" b="1">
+                        <a:rPr sz="1000" b="1">
                           <a:solidFill>
                             <a:srgbClr val="FFFFFF"/>
                           </a:solidFill>
@@ -4204,14 +4355,14 @@
                       </a:r>
                     </a:p>
                   </a:txBody>
-                  <a:tcPr marL="45000" marR="45000" marT="18000" marB="18000" anchor="ctr">
+                  <a:tcPr marL="40000" marR="40000" marT="12000" marB="12000" anchor="ctr">
                     <a:solidFill>
                       <a:srgbClr val="2E3B4E"/>
                     </a:solidFill>
                   </a:tcPr>
                 </a:tc>
               </a:tr>
-              <a:tr h="620485">
+              <a:tr h="462425">
                 <a:tc>
                   <a:txBody>
                     <a:bodyPr wrap="square"/>
@@ -4219,7 +4370,7 @@
                     <a:p>
                       <a:pPr algn="ctr"/>
                       <a:r>
-                        <a:rPr sz="950" b="1">
+                        <a:rPr sz="900" b="1">
                           <a:solidFill>
                             <a:srgbClr val="000000"/>
                           </a:solidFill>
@@ -4231,7 +4382,7 @@
                     <a:p>
                       <a:pPr algn="ctr"/>
                       <a:r>
-                        <a:rPr sz="950" b="1">
+                        <a:rPr sz="900" b="1">
                           <a:solidFill>
                             <a:srgbClr val="000000"/>
                           </a:solidFill>
@@ -4241,7 +4392,7 @@
                       </a:r>
                     </a:p>
                   </a:txBody>
-                  <a:tcPr marL="45000" marR="45000" marT="18000" marB="18000" anchor="ctr">
+                  <a:tcPr marL="40000" marR="40000" marT="12000" marB="12000" anchor="ctr">
                     <a:solidFill>
                       <a:srgbClr val="FFFFFF"/>
                     </a:solidFill>
@@ -4254,7 +4405,7 @@
                     <a:p>
                       <a:pPr algn="l"/>
                       <a:r>
-                        <a:rPr sz="850" b="0">
+                        <a:rPr sz="800" b="0">
                           <a:solidFill>
                             <a:srgbClr val="000000"/>
                           </a:solidFill>
@@ -4264,7 +4415,7 @@
                       </a:r>
                     </a:p>
                   </a:txBody>
-                  <a:tcPr marL="45000" marR="45000" marT="18000" marB="18000" anchor="ctr">
+                  <a:tcPr marL="40000" marR="40000" marT="12000" marB="12000" anchor="ctr">
                     <a:solidFill>
                       <a:srgbClr val="FFFFFF"/>
                     </a:solidFill>
@@ -4277,7 +4428,7 @@
                     <a:p>
                       <a:pPr algn="l"/>
                       <a:r>
-                        <a:rPr sz="850" b="0">
+                        <a:rPr sz="800" b="0">
                           <a:solidFill>
                             <a:srgbClr val="000000"/>
                           </a:solidFill>
@@ -4287,7 +4438,7 @@
                       </a:r>
                     </a:p>
                   </a:txBody>
-                  <a:tcPr marL="45000" marR="45000" marT="18000" marB="18000" anchor="ctr">
+                  <a:tcPr marL="40000" marR="40000" marT="12000" marB="12000" anchor="ctr">
                     <a:solidFill>
                       <a:srgbClr val="FFFFFF"/>
                     </a:solidFill>
@@ -4300,7 +4451,7 @@
                     <a:p>
                       <a:pPr algn="l"/>
                       <a:r>
-                        <a:rPr sz="850" b="0">
+                        <a:rPr sz="800" b="0">
                           <a:solidFill>
                             <a:srgbClr val="000000"/>
                           </a:solidFill>
@@ -4310,7 +4461,7 @@
                       </a:r>
                     </a:p>
                   </a:txBody>
-                  <a:tcPr marL="45000" marR="45000" marT="18000" marB="18000" anchor="ctr">
+                  <a:tcPr marL="40000" marR="40000" marT="12000" marB="12000" anchor="ctr">
                     <a:solidFill>
                       <a:srgbClr val="FFFFFF"/>
                     </a:solidFill>
@@ -4323,7 +4474,7 @@
                     <a:p>
                       <a:pPr algn="l"/>
                       <a:r>
-                        <a:rPr sz="850" b="0">
+                        <a:rPr sz="800" b="0">
                           <a:solidFill>
                             <a:srgbClr val="000000"/>
                           </a:solidFill>
@@ -4333,14 +4484,14 @@
                       </a:r>
                     </a:p>
                   </a:txBody>
-                  <a:tcPr marL="45000" marR="45000" marT="18000" marB="18000" anchor="ctr">
+                  <a:tcPr marL="40000" marR="40000" marT="12000" marB="12000" anchor="ctr">
                     <a:solidFill>
                       <a:srgbClr val="FFFFFF"/>
                     </a:solidFill>
                   </a:tcPr>
                 </a:tc>
               </a:tr>
-              <a:tr h="620485">
+              <a:tr h="462425">
                 <a:tc>
                   <a:txBody>
                     <a:bodyPr wrap="square"/>
@@ -4348,7 +4499,7 @@
                     <a:p>
                       <a:pPr algn="ctr"/>
                       <a:r>
-                        <a:rPr sz="950" b="1">
+                        <a:rPr sz="900" b="1">
                           <a:solidFill>
                             <a:srgbClr val="000000"/>
                           </a:solidFill>
@@ -4358,7 +4509,7 @@
                       </a:r>
                     </a:p>
                   </a:txBody>
-                  <a:tcPr marL="45000" marR="45000" marT="18000" marB="18000" anchor="ctr">
+                  <a:tcPr marL="40000" marR="40000" marT="12000" marB="12000" anchor="ctr">
                     <a:solidFill>
                       <a:srgbClr val="F4F6F8"/>
                     </a:solidFill>
@@ -4371,7 +4522,7 @@
                     <a:p>
                       <a:pPr algn="l"/>
                       <a:r>
-                        <a:rPr sz="850" b="0">
+                        <a:rPr sz="800" b="0">
                           <a:solidFill>
                             <a:srgbClr val="000000"/>
                           </a:solidFill>
@@ -4381,7 +4532,7 @@
                       </a:r>
                     </a:p>
                   </a:txBody>
-                  <a:tcPr marL="45000" marR="45000" marT="18000" marB="18000" anchor="ctr">
+                  <a:tcPr marL="40000" marR="40000" marT="12000" marB="12000" anchor="ctr">
                     <a:solidFill>
                       <a:srgbClr val="F4F6F8"/>
                     </a:solidFill>
@@ -4394,7 +4545,7 @@
                     <a:p>
                       <a:pPr algn="l"/>
                       <a:r>
-                        <a:rPr sz="850" b="0">
+                        <a:rPr sz="800" b="0">
                           <a:solidFill>
                             <a:srgbClr val="000000"/>
                           </a:solidFill>
@@ -4404,7 +4555,7 @@
                       </a:r>
                     </a:p>
                   </a:txBody>
-                  <a:tcPr marL="45000" marR="45000" marT="18000" marB="18000" anchor="ctr">
+                  <a:tcPr marL="40000" marR="40000" marT="12000" marB="12000" anchor="ctr">
                     <a:solidFill>
                       <a:srgbClr val="F4F6F8"/>
                     </a:solidFill>
@@ -4417,7 +4568,7 @@
                     <a:p>
                       <a:pPr algn="l"/>
                       <a:r>
-                        <a:rPr sz="850" b="0">
+                        <a:rPr sz="800" b="0">
                           <a:solidFill>
                             <a:srgbClr val="000000"/>
                           </a:solidFill>
@@ -4427,7 +4578,7 @@
                       </a:r>
                     </a:p>
                   </a:txBody>
-                  <a:tcPr marL="45000" marR="45000" marT="18000" marB="18000" anchor="ctr">
+                  <a:tcPr marL="40000" marR="40000" marT="12000" marB="12000" anchor="ctr">
                     <a:solidFill>
                       <a:srgbClr val="F4F6F8"/>
                     </a:solidFill>
@@ -4440,7 +4591,7 @@
                     <a:p>
                       <a:pPr algn="l"/>
                       <a:r>
-                        <a:rPr sz="850" b="0">
+                        <a:rPr sz="800" b="0">
                           <a:solidFill>
                             <a:srgbClr val="000000"/>
                           </a:solidFill>
@@ -4450,14 +4601,14 @@
                       </a:r>
                     </a:p>
                   </a:txBody>
-                  <a:tcPr marL="45000" marR="45000" marT="18000" marB="18000" anchor="ctr">
+                  <a:tcPr marL="40000" marR="40000" marT="12000" marB="12000" anchor="ctr">
                     <a:solidFill>
                       <a:srgbClr val="F4F6F8"/>
                     </a:solidFill>
                   </a:tcPr>
                 </a:tc>
               </a:tr>
-              <a:tr h="620485">
+              <a:tr h="462425">
                 <a:tc>
                   <a:txBody>
                     <a:bodyPr wrap="square"/>
@@ -4465,7 +4616,7 @@
                     <a:p>
                       <a:pPr algn="ctr"/>
                       <a:r>
-                        <a:rPr sz="950" b="1">
+                        <a:rPr sz="900" b="1">
                           <a:solidFill>
                             <a:srgbClr val="000000"/>
                           </a:solidFill>
@@ -4475,7 +4626,7 @@
                       </a:r>
                     </a:p>
                   </a:txBody>
-                  <a:tcPr marL="45000" marR="45000" marT="18000" marB="18000" anchor="ctr">
+                  <a:tcPr marL="40000" marR="40000" marT="12000" marB="12000" anchor="ctr">
                     <a:solidFill>
                       <a:srgbClr val="FFFFFF"/>
                     </a:solidFill>
@@ -4488,7 +4639,7 @@
                     <a:p>
                       <a:pPr algn="l"/>
                       <a:r>
-                        <a:rPr sz="850" b="0">
+                        <a:rPr sz="800" b="0">
                           <a:solidFill>
                             <a:srgbClr val="000000"/>
                           </a:solidFill>
@@ -4498,7 +4649,7 @@
                       </a:r>
                     </a:p>
                   </a:txBody>
-                  <a:tcPr marL="45000" marR="45000" marT="18000" marB="18000" anchor="ctr">
+                  <a:tcPr marL="40000" marR="40000" marT="12000" marB="12000" anchor="ctr">
                     <a:solidFill>
                       <a:srgbClr val="FFFFFF"/>
                     </a:solidFill>
@@ -4511,7 +4662,7 @@
                     <a:p>
                       <a:pPr algn="l"/>
                       <a:r>
-                        <a:rPr sz="850" b="0">
+                        <a:rPr sz="800" b="0">
                           <a:solidFill>
                             <a:srgbClr val="000000"/>
                           </a:solidFill>
@@ -4521,7 +4672,7 @@
                       </a:r>
                     </a:p>
                   </a:txBody>
-                  <a:tcPr marL="45000" marR="45000" marT="18000" marB="18000" anchor="ctr">
+                  <a:tcPr marL="40000" marR="40000" marT="12000" marB="12000" anchor="ctr">
                     <a:solidFill>
                       <a:srgbClr val="FFFFFF"/>
                     </a:solidFill>
@@ -4534,7 +4685,7 @@
                     <a:p>
                       <a:pPr algn="l"/>
                       <a:r>
-                        <a:rPr sz="850" b="0">
+                        <a:rPr sz="800" b="0">
                           <a:solidFill>
                             <a:srgbClr val="000000"/>
                           </a:solidFill>
@@ -4544,7 +4695,7 @@
                       </a:r>
                     </a:p>
                   </a:txBody>
-                  <a:tcPr marL="45000" marR="45000" marT="18000" marB="18000" anchor="ctr">
+                  <a:tcPr marL="40000" marR="40000" marT="12000" marB="12000" anchor="ctr">
                     <a:solidFill>
                       <a:srgbClr val="FFFFFF"/>
                     </a:solidFill>
@@ -4557,7 +4708,7 @@
                     <a:p>
                       <a:pPr algn="l"/>
                       <a:r>
-                        <a:rPr sz="850" b="0">
+                        <a:rPr sz="800" b="0">
                           <a:solidFill>
                             <a:srgbClr val="000000"/>
                           </a:solidFill>
@@ -4567,14 +4718,14 @@
                       </a:r>
                     </a:p>
                   </a:txBody>
-                  <a:tcPr marL="45000" marR="45000" marT="18000" marB="18000" anchor="ctr">
+                  <a:tcPr marL="40000" marR="40000" marT="12000" marB="12000" anchor="ctr">
                     <a:solidFill>
                       <a:srgbClr val="FFFFFF"/>
                     </a:solidFill>
                   </a:tcPr>
                 </a:tc>
               </a:tr>
-              <a:tr h="620485">
+              <a:tr h="462425">
                 <a:tc>
                   <a:txBody>
                     <a:bodyPr wrap="square"/>
@@ -4582,7 +4733,7 @@
                     <a:p>
                       <a:pPr algn="ctr"/>
                       <a:r>
-                        <a:rPr sz="950" b="1">
+                        <a:rPr sz="900" b="1">
                           <a:solidFill>
                             <a:srgbClr val="000000"/>
                           </a:solidFill>
@@ -4594,7 +4745,7 @@
                     <a:p>
                       <a:pPr algn="ctr"/>
                       <a:r>
-                        <a:rPr sz="950" b="1">
+                        <a:rPr sz="900" b="1">
                           <a:solidFill>
                             <a:srgbClr val="000000"/>
                           </a:solidFill>
@@ -4604,7 +4755,7 @@
                       </a:r>
                     </a:p>
                   </a:txBody>
-                  <a:tcPr marL="45000" marR="45000" marT="18000" marB="18000" anchor="ctr">
+                  <a:tcPr marL="40000" marR="40000" marT="12000" marB="12000" anchor="ctr">
                     <a:solidFill>
                       <a:srgbClr val="F4F6F8"/>
                     </a:solidFill>
@@ -4617,7 +4768,7 @@
                     <a:p>
                       <a:pPr algn="l"/>
                       <a:r>
-                        <a:rPr sz="850" b="0">
+                        <a:rPr sz="800" b="0">
                           <a:solidFill>
                             <a:srgbClr val="000000"/>
                           </a:solidFill>
@@ -4627,7 +4778,7 @@
                       </a:r>
                     </a:p>
                   </a:txBody>
-                  <a:tcPr marL="45000" marR="45000" marT="18000" marB="18000" anchor="ctr">
+                  <a:tcPr marL="40000" marR="40000" marT="12000" marB="12000" anchor="ctr">
                     <a:solidFill>
                       <a:srgbClr val="F4F6F8"/>
                     </a:solidFill>
@@ -4640,7 +4791,7 @@
                     <a:p>
                       <a:pPr algn="l"/>
                       <a:r>
-                        <a:rPr sz="850" b="0">
+                        <a:rPr sz="800" b="0">
                           <a:solidFill>
                             <a:srgbClr val="000000"/>
                           </a:solidFill>
@@ -4650,7 +4801,7 @@
                       </a:r>
                     </a:p>
                   </a:txBody>
-                  <a:tcPr marL="45000" marR="45000" marT="18000" marB="18000" anchor="ctr">
+                  <a:tcPr marL="40000" marR="40000" marT="12000" marB="12000" anchor="ctr">
                     <a:solidFill>
                       <a:srgbClr val="F4F6F8"/>
                     </a:solidFill>
@@ -4663,7 +4814,7 @@
                     <a:p>
                       <a:pPr algn="l"/>
                       <a:r>
-                        <a:rPr sz="850" b="0">
+                        <a:rPr sz="800" b="0">
                           <a:solidFill>
                             <a:srgbClr val="000000"/>
                           </a:solidFill>
@@ -4673,7 +4824,7 @@
                       </a:r>
                     </a:p>
                   </a:txBody>
-                  <a:tcPr marL="45000" marR="45000" marT="18000" marB="18000" anchor="ctr">
+                  <a:tcPr marL="40000" marR="40000" marT="12000" marB="12000" anchor="ctr">
                     <a:solidFill>
                       <a:srgbClr val="F4F6F8"/>
                     </a:solidFill>
@@ -4686,7 +4837,7 @@
                     <a:p>
                       <a:pPr algn="l"/>
                       <a:r>
-                        <a:rPr sz="850" b="0">
+                        <a:rPr sz="800" b="0">
                           <a:solidFill>
                             <a:srgbClr val="000000"/>
                           </a:solidFill>
@@ -4696,14 +4847,14 @@
                       </a:r>
                     </a:p>
                   </a:txBody>
-                  <a:tcPr marL="45000" marR="45000" marT="18000" marB="18000" anchor="ctr">
+                  <a:tcPr marL="40000" marR="40000" marT="12000" marB="12000" anchor="ctr">
                     <a:solidFill>
                       <a:srgbClr val="F4F6F8"/>
                     </a:solidFill>
                   </a:tcPr>
                 </a:tc>
               </a:tr>
-              <a:tr h="620485">
+              <a:tr h="462425">
                 <a:tc>
                   <a:txBody>
                     <a:bodyPr wrap="square"/>
@@ -4711,7 +4862,7 @@
                     <a:p>
                       <a:pPr algn="ctr"/>
                       <a:r>
-                        <a:rPr sz="950" b="1">
+                        <a:rPr sz="900" b="1">
                           <a:solidFill>
                             <a:srgbClr val="000000"/>
                           </a:solidFill>
@@ -4721,7 +4872,7 @@
                       </a:r>
                     </a:p>
                   </a:txBody>
-                  <a:tcPr marL="45000" marR="45000" marT="18000" marB="18000" anchor="ctr">
+                  <a:tcPr marL="40000" marR="40000" marT="12000" marB="12000" anchor="ctr">
                     <a:solidFill>
                       <a:srgbClr val="FFFFFF"/>
                     </a:solidFill>
@@ -4734,7 +4885,7 @@
                     <a:p>
                       <a:pPr algn="l"/>
                       <a:r>
-                        <a:rPr sz="850" b="0">
+                        <a:rPr sz="800" b="0">
                           <a:solidFill>
                             <a:srgbClr val="000000"/>
                           </a:solidFill>
@@ -4744,7 +4895,7 @@
                       </a:r>
                     </a:p>
                   </a:txBody>
-                  <a:tcPr marL="45000" marR="45000" marT="18000" marB="18000" anchor="ctr">
+                  <a:tcPr marL="40000" marR="40000" marT="12000" marB="12000" anchor="ctr">
                     <a:solidFill>
                       <a:srgbClr val="FFFFFF"/>
                     </a:solidFill>
@@ -4757,7 +4908,7 @@
                     <a:p>
                       <a:pPr algn="l"/>
                       <a:r>
-                        <a:rPr sz="850" b="0">
+                        <a:rPr sz="800" b="0">
                           <a:solidFill>
                             <a:srgbClr val="000000"/>
                           </a:solidFill>
@@ -4767,7 +4918,7 @@
                       </a:r>
                     </a:p>
                   </a:txBody>
-                  <a:tcPr marL="45000" marR="45000" marT="18000" marB="18000" anchor="ctr">
+                  <a:tcPr marL="40000" marR="40000" marT="12000" marB="12000" anchor="ctr">
                     <a:solidFill>
                       <a:srgbClr val="FFFFFF"/>
                     </a:solidFill>
@@ -4780,7 +4931,7 @@
                     <a:p>
                       <a:pPr algn="l"/>
                       <a:r>
-                        <a:rPr sz="850" b="0">
+                        <a:rPr sz="800" b="0">
                           <a:solidFill>
                             <a:srgbClr val="000000"/>
                           </a:solidFill>
@@ -4790,7 +4941,7 @@
                       </a:r>
                     </a:p>
                   </a:txBody>
-                  <a:tcPr marL="45000" marR="45000" marT="18000" marB="18000" anchor="ctr">
+                  <a:tcPr marL="40000" marR="40000" marT="12000" marB="12000" anchor="ctr">
                     <a:solidFill>
                       <a:srgbClr val="FFFFFF"/>
                     </a:solidFill>
@@ -4803,7 +4954,7 @@
                     <a:p>
                       <a:pPr algn="l"/>
                       <a:r>
-                        <a:rPr sz="850" b="0">
+                        <a:rPr sz="800" b="0">
                           <a:solidFill>
                             <a:srgbClr val="000000"/>
                           </a:solidFill>
@@ -4813,14 +4964,14 @@
                       </a:r>
                     </a:p>
                   </a:txBody>
-                  <a:tcPr marL="45000" marR="45000" marT="18000" marB="18000" anchor="ctr">
+                  <a:tcPr marL="40000" marR="40000" marT="12000" marB="12000" anchor="ctr">
                     <a:solidFill>
                       <a:srgbClr val="FFFFFF"/>
                     </a:solidFill>
                   </a:tcPr>
                 </a:tc>
               </a:tr>
-              <a:tr h="620485">
+              <a:tr h="462425">
                 <a:tc>
                   <a:txBody>
                     <a:bodyPr wrap="square"/>
@@ -4828,7 +4979,7 @@
                     <a:p>
                       <a:pPr algn="ctr"/>
                       <a:r>
-                        <a:rPr sz="950" b="1">
+                        <a:rPr sz="900" b="1">
                           <a:solidFill>
                             <a:srgbClr val="000000"/>
                           </a:solidFill>
@@ -4838,7 +4989,7 @@
                       </a:r>
                     </a:p>
                   </a:txBody>
-                  <a:tcPr marL="45000" marR="45000" marT="18000" marB="18000" anchor="ctr">
+                  <a:tcPr marL="40000" marR="40000" marT="12000" marB="12000" anchor="ctr">
                     <a:solidFill>
                       <a:srgbClr val="F4F6F8"/>
                     </a:solidFill>
@@ -4851,7 +5002,7 @@
                     <a:p>
                       <a:pPr algn="l"/>
                       <a:r>
-                        <a:rPr sz="850" b="0">
+                        <a:rPr sz="800" b="0">
                           <a:solidFill>
                             <a:srgbClr val="000000"/>
                           </a:solidFill>
@@ -4861,7 +5012,7 @@
                       </a:r>
                     </a:p>
                   </a:txBody>
-                  <a:tcPr marL="45000" marR="45000" marT="18000" marB="18000" anchor="ctr">
+                  <a:tcPr marL="40000" marR="40000" marT="12000" marB="12000" anchor="ctr">
                     <a:solidFill>
                       <a:srgbClr val="F4F6F8"/>
                     </a:solidFill>
@@ -4874,7 +5025,7 @@
                     <a:p>
                       <a:pPr algn="l"/>
                       <a:r>
-                        <a:rPr sz="850" b="0">
+                        <a:rPr sz="800" b="0">
                           <a:solidFill>
                             <a:srgbClr val="000000"/>
                           </a:solidFill>
@@ -4884,7 +5035,7 @@
                       </a:r>
                     </a:p>
                   </a:txBody>
-                  <a:tcPr marL="45000" marR="45000" marT="18000" marB="18000" anchor="ctr">
+                  <a:tcPr marL="40000" marR="40000" marT="12000" marB="12000" anchor="ctr">
                     <a:solidFill>
                       <a:srgbClr val="F4F6F8"/>
                     </a:solidFill>
@@ -4897,7 +5048,7 @@
                     <a:p>
                       <a:pPr algn="l"/>
                       <a:r>
-                        <a:rPr sz="850" b="0">
+                        <a:rPr sz="800" b="0">
                           <a:solidFill>
                             <a:srgbClr val="000000"/>
                           </a:solidFill>
@@ -4907,7 +5058,7 @@
                       </a:r>
                     </a:p>
                   </a:txBody>
-                  <a:tcPr marL="45000" marR="45000" marT="18000" marB="18000" anchor="ctr">
+                  <a:tcPr marL="40000" marR="40000" marT="12000" marB="12000" anchor="ctr">
                     <a:solidFill>
                       <a:srgbClr val="F4F6F8"/>
                     </a:solidFill>
@@ -4920,7 +5071,7 @@
                     <a:p>
                       <a:pPr algn="l"/>
                       <a:r>
-                        <a:rPr sz="850" b="0">
+                        <a:rPr sz="800" b="0">
                           <a:solidFill>
                             <a:srgbClr val="000000"/>
                           </a:solidFill>
@@ -4930,14 +5081,14 @@
                       </a:r>
                     </a:p>
                   </a:txBody>
-                  <a:tcPr marL="45000" marR="45000" marT="18000" marB="18000" anchor="ctr">
+                  <a:tcPr marL="40000" marR="40000" marT="12000" marB="12000" anchor="ctr">
                     <a:solidFill>
                       <a:srgbClr val="F4F6F8"/>
                     </a:solidFill>
                   </a:tcPr>
                 </a:tc>
               </a:tr>
-              <a:tr h="620485">
+              <a:tr h="462425">
                 <a:tc>
                   <a:txBody>
                     <a:bodyPr wrap="square"/>
@@ -4945,7 +5096,7 @@
                     <a:p>
                       <a:pPr algn="ctr"/>
                       <a:r>
-                        <a:rPr sz="950" b="1">
+                        <a:rPr sz="900" b="1">
                           <a:solidFill>
                             <a:srgbClr val="000000"/>
                           </a:solidFill>
@@ -4957,7 +5108,7 @@
                     <a:p>
                       <a:pPr algn="ctr"/>
                       <a:r>
-                        <a:rPr sz="950" b="1">
+                        <a:rPr sz="900" b="1">
                           <a:solidFill>
                             <a:srgbClr val="000000"/>
                           </a:solidFill>
@@ -4967,7 +5118,7 @@
                       </a:r>
                     </a:p>
                   </a:txBody>
-                  <a:tcPr marL="45000" marR="45000" marT="18000" marB="18000" anchor="ctr">
+                  <a:tcPr marL="40000" marR="40000" marT="12000" marB="12000" anchor="ctr">
                     <a:solidFill>
                       <a:srgbClr val="FFFFFF"/>
                     </a:solidFill>
@@ -4980,7 +5131,7 @@
                     <a:p>
                       <a:pPr algn="l"/>
                       <a:r>
-                        <a:rPr sz="850" b="0">
+                        <a:rPr sz="800" b="0">
                           <a:solidFill>
                             <a:srgbClr val="000000"/>
                           </a:solidFill>
@@ -4990,7 +5141,7 @@
                       </a:r>
                     </a:p>
                   </a:txBody>
-                  <a:tcPr marL="45000" marR="45000" marT="18000" marB="18000" anchor="ctr">
+                  <a:tcPr marL="40000" marR="40000" marT="12000" marB="12000" anchor="ctr">
                     <a:solidFill>
                       <a:srgbClr val="FFFFFF"/>
                     </a:solidFill>
@@ -5003,7 +5154,7 @@
                     <a:p>
                       <a:pPr algn="l"/>
                       <a:r>
-                        <a:rPr sz="850" b="0">
+                        <a:rPr sz="800" b="0">
                           <a:solidFill>
                             <a:srgbClr val="000000"/>
                           </a:solidFill>
@@ -5013,7 +5164,7 @@
                       </a:r>
                     </a:p>
                   </a:txBody>
-                  <a:tcPr marL="45000" marR="45000" marT="18000" marB="18000" anchor="ctr">
+                  <a:tcPr marL="40000" marR="40000" marT="12000" marB="12000" anchor="ctr">
                     <a:solidFill>
                       <a:srgbClr val="FFFFFF"/>
                     </a:solidFill>
@@ -5026,7 +5177,7 @@
                     <a:p>
                       <a:pPr algn="l"/>
                       <a:r>
-                        <a:rPr sz="850" b="0">
+                        <a:rPr sz="800" b="0">
                           <a:solidFill>
                             <a:srgbClr val="000000"/>
                           </a:solidFill>
@@ -5036,7 +5187,7 @@
                       </a:r>
                     </a:p>
                   </a:txBody>
-                  <a:tcPr marL="45000" marR="45000" marT="18000" marB="18000" anchor="ctr">
+                  <a:tcPr marL="40000" marR="40000" marT="12000" marB="12000" anchor="ctr">
                     <a:solidFill>
                       <a:srgbClr val="FFFFFF"/>
                     </a:solidFill>
@@ -5049,7 +5200,7 @@
                     <a:p>
                       <a:pPr algn="l"/>
                       <a:r>
-                        <a:rPr sz="850" b="0">
+                        <a:rPr sz="800" b="0">
                           <a:solidFill>
                             <a:srgbClr val="000000"/>
                           </a:solidFill>
@@ -5059,7 +5210,7 @@
                       </a:r>
                     </a:p>
                   </a:txBody>
-                  <a:tcPr marL="45000" marR="45000" marT="18000" marB="18000" anchor="ctr">
+                  <a:tcPr marL="40000" marR="40000" marT="12000" marB="12000" anchor="ctr">
                     <a:solidFill>
                       <a:srgbClr val="FFFFFF"/>
                     </a:solidFill>

--- a/Andy/FinMem_架構圖.pptx
+++ b/Andy/FinMem_架構圖.pptx
@@ -3130,7 +3130,7 @@
         </p:nvSpPr>
         <p:spPr>
           <a:xfrm>
-            <a:off x="6644487" y="384048"/>
+            <a:off x="5227167" y="384048"/>
             <a:ext cx="1737360" cy="566928"/>
           </a:xfrm>
           <a:prstGeom prst="roundRect">
@@ -3197,7 +3197,7 @@
         </p:nvCxnSpPr>
         <p:spPr>
           <a:xfrm>
-            <a:off x="7513167" y="950976"/>
+            <a:off x="6095847" y="950976"/>
             <a:ext cx="0" cy="283464"/>
           </a:xfrm>
           <a:prstGeom prst="line">
@@ -3233,8 +3233,8 @@
         </p:nvSpPr>
         <p:spPr>
           <a:xfrm>
-            <a:off x="8519007" y="411479"/>
-            <a:ext cx="2468880" cy="548640"/>
+            <a:off x="7101687" y="411479"/>
+            <a:ext cx="2651760" cy="548640"/>
           </a:xfrm>
           <a:prstGeom prst="rect">
             <a:avLst/>
@@ -3255,8 +3255,8 @@
                 </a:solidFill>
                 <a:latin typeface="Microsoft JhengHei"/>
               </a:rPr>
-              <a:t>非每日流程,建立 Agent 時
-設定一次,供 Reflect 引用</a:t>
+              <a:t>非每日流程,建立 Agent 時設定一次,
+當作 Retrieve 檢索記憶的查詢依據</a:t>
             </a:r>
           </a:p>
         </p:txBody>
@@ -4411,7 +4411,7 @@
                           </a:solidFill>
                           <a:latin typeface="Microsoft JhengHei"/>
                         </a:rPr>
-                        <a:t>LLM(GPT-4/TGI)依 prompt 模板生成角色設定,分激進/保守/自適應三型</a:t>
+                        <a:t>建立 Agent 時,由設定檔裡固定的一段文字模板決定,描述交易專長與風險傾向,模擬過程中不再改變(非 LLM 動態生成)</a:t>
                       </a:r>
                     </a:p>
                   </a:txBody>
@@ -4434,7 +4434,7 @@
                           </a:solidFill>
                           <a:latin typeface="Microsoft JhengHei"/>
                         </a:rPr>
-                        <a:t>Ticker、歷史財務背景資料</a:t>
+                        <a:t>設定檔裡寫好的產業背景與人設文字</a:t>
                       </a:r>
                     </a:p>
                   </a:txBody>
@@ -4457,7 +4457,7 @@
                           </a:solidFill>
                           <a:latin typeface="Microsoft JhengHei"/>
                         </a:rPr>
-                        <a:t>角色人設文字(風險傾向)</a:t>
+                        <a:t>貫穿模擬過程使用的角色人設字串,做為 Retrieve 檢索記憶的查詢依據</a:t>
                       </a:r>
                     </a:p>
                   </a:txBody>
@@ -4480,7 +4480,7 @@
                           </a:solidFill>
                           <a:latin typeface="Microsoft JhengHei"/>
                         </a:rPr>
-                        <a:t>決定交易風格傾向</a:t>
+                        <a:t>決定檢索時撈出哪些記憶,間接影響反思與決策</a:t>
                       </a:r>
                     </a:p>
                   </a:txBody>
@@ -5137,7 +5137,7 @@
                           </a:solidFill>
                           <a:latin typeface="Microsoft JhengHei"/>
                         </a:rPr>
-                        <a:t>整合角色人設、反思結果與持倉狀態,由 LLM 產出決策並更新 Portfolio</a:t>
+                        <a:t>整合反思結果與持倉狀態,由 LLM 產出決策並更新 Portfolio</a:t>
                       </a:r>
                     </a:p>
                   </a:txBody>
@@ -5160,7 +5160,7 @@
                           </a:solidFill>
                           <a:latin typeface="Microsoft JhengHei"/>
                         </a:rPr>
-                        <a:t>Reflect 推理結果＋角色人設＋目前持倉</a:t>
+                        <a:t>Reflect 推理結果＋目前持倉</a:t>
                       </a:r>
                     </a:p>
                   </a:txBody>
